--- a/public/fun/pack/pptx/talk/발표템플릿_40_연말결산·회고_붕어빵포장마차.pptx
+++ b/public/fun/pack/pptx/talk/발표템플릿_40_연말결산·회고_붕어빵포장마차.pptx
@@ -3286,14 +3286,6 @@
 <file path=ppt/slides/slide1.xml><?xml version="1.0" encoding="utf-8"?>
 <p:sld xmlns:a="http://schemas.openxmlformats.org/drawingml/2006/main" xmlns:p="http://schemas.openxmlformats.org/presentationml/2006/main" xmlns:r="http://schemas.openxmlformats.org/officeDocument/2006/relationships">
   <p:cSld>
-    <p:bg>
-      <p:bgPr>
-        <a:solidFill>
-          <a:srgbClr val="FFFFFF"/>
-        </a:solidFill>
-        <a:effectLst/>
-      </p:bgPr>
-    </p:bg>
     <p:spTree>
       <p:nvGrpSpPr>
         <p:cNvPr id="1" name=""/>
@@ -3301,383 +3293,30 @@
         <p:nvPr/>
       </p:nvGrpSpPr>
       <p:grpSpPr/>
-      <p:sp>
-        <p:nvSpPr>
-          <p:cNvPr id="3" name="장식"/>
-          <p:cNvSpPr/>
+      <p:pic>
+        <p:nvPicPr>
+          <p:cNvPr id="3" name="표지 그림" descr="talk-40.jpg"/>
+          <p:cNvPicPr>
+            <a:picLocks noChangeAspect="1"/>
+          </p:cNvPicPr>
           <p:nvPr/>
-        </p:nvSpPr>
-        <p:spPr>
-          <a:xfrm>
-            <a:off x="0" y="2057400"/>
-            <a:ext cx="10241023" cy="1828800"/>
-          </a:xfrm>
-          <a:prstGeom prst="homePlate">
-            <a:avLst/>
-          </a:prstGeom>
-          <a:solidFill>
-            <a:srgbClr val="AE7429"/>
-          </a:solidFill>
-          <a:ln>
-            <a:noFill/>
-          </a:ln>
-        </p:spPr>
-        <p:txBody>
-          <a:bodyPr rtlCol="0" anchor="ctr"/>
-          <a:lstStyle/>
-          <a:p>
-            <a:pPr algn="ctr"/>
-          </a:p>
-        </p:txBody>
-      </p:sp>
-      <p:sp>
-        <p:nvSpPr>
-          <p:cNvPr id="4" name="장식"/>
-          <p:cNvSpPr/>
-          <p:nvPr/>
-        </p:nvSpPr>
-        <p:spPr>
-          <a:xfrm>
-            <a:off x="0" y="3886200"/>
-            <a:ext cx="9509522" cy="64008"/>
+        </p:nvPicPr>
+        <p:blipFill>
+          <a:blip r:embed="rId2"/>
+          <a:stretch>
+            <a:fillRect/>
+          </a:stretch>
+        </p:blipFill>
+        <p:spPr>
+          <a:xfrm>
+            <a:off x="0" y="0"/>
+            <a:ext cx="12191695" cy="6858000"/>
           </a:xfrm>
           <a:prstGeom prst="rect">
             <a:avLst/>
           </a:prstGeom>
-          <a:solidFill>
-            <a:srgbClr val="3B8B91"/>
-          </a:solidFill>
-          <a:ln>
-            <a:noFill/>
-          </a:ln>
-        </p:spPr>
-        <p:txBody>
-          <a:bodyPr rtlCol="0" anchor="ctr"/>
-          <a:lstStyle/>
-          <a:p>
-            <a:pPr algn="ctr"/>
-          </a:p>
-        </p:txBody>
-      </p:sp>
-      <p:sp>
-        <p:nvSpPr>
-          <p:cNvPr id="5" name="장식"/>
-          <p:cNvSpPr/>
-          <p:nvPr/>
-        </p:nvSpPr>
-        <p:spPr>
-          <a:xfrm>
-            <a:off x="9263744" y="704815"/>
-            <a:ext cx="452864" cy="452864"/>
-          </a:xfrm>
-          <a:prstGeom prst="ellipse">
-            <a:avLst/>
-          </a:prstGeom>
-          <a:solidFill>
-            <a:srgbClr val="AE7429"/>
-          </a:solidFill>
-          <a:ln>
-            <a:noFill/>
-          </a:ln>
-        </p:spPr>
-        <p:txBody>
-          <a:bodyPr rtlCol="0" anchor="ctr"/>
-          <a:lstStyle/>
-          <a:p>
-            <a:pPr algn="ctr"/>
-          </a:p>
-        </p:txBody>
-      </p:sp>
-      <p:sp>
-        <p:nvSpPr>
-          <p:cNvPr id="6" name="장식"/>
-          <p:cNvSpPr/>
-          <p:nvPr/>
-        </p:nvSpPr>
-        <p:spPr>
-          <a:xfrm>
-            <a:off x="10595107" y="856829"/>
-            <a:ext cx="275764" cy="275764"/>
-          </a:xfrm>
-          <a:prstGeom prst="ellipse">
-            <a:avLst/>
-          </a:prstGeom>
-          <a:solidFill>
-            <a:srgbClr val="F5E3CC"/>
-          </a:solidFill>
-          <a:ln>
-            <a:noFill/>
-          </a:ln>
-        </p:spPr>
-        <p:txBody>
-          <a:bodyPr rtlCol="0" anchor="ctr"/>
-          <a:lstStyle/>
-          <a:p>
-            <a:pPr algn="ctr"/>
-          </a:p>
-        </p:txBody>
-      </p:sp>
-      <p:sp>
-        <p:nvSpPr>
-          <p:cNvPr id="7" name="장식"/>
-          <p:cNvSpPr/>
-          <p:nvPr/>
-        </p:nvSpPr>
-        <p:spPr>
-          <a:xfrm>
-            <a:off x="11246098" y="2492187"/>
-            <a:ext cx="292227" cy="292227"/>
-          </a:xfrm>
-          <a:prstGeom prst="ellipse">
-            <a:avLst/>
-          </a:prstGeom>
-          <a:solidFill>
-            <a:srgbClr val="3B8B91"/>
-          </a:solidFill>
-          <a:ln>
-            <a:noFill/>
-          </a:ln>
-        </p:spPr>
-        <p:txBody>
-          <a:bodyPr rtlCol="0" anchor="ctr"/>
-          <a:lstStyle/>
-          <a:p>
-            <a:pPr algn="ctr"/>
-          </a:p>
-        </p:txBody>
-      </p:sp>
-      <p:sp>
-        <p:nvSpPr>
-          <p:cNvPr id="8" name="장식"/>
-          <p:cNvSpPr/>
-          <p:nvPr/>
-        </p:nvSpPr>
-        <p:spPr>
-          <a:xfrm>
-            <a:off x="10856002" y="963247"/>
-            <a:ext cx="216899" cy="216899"/>
-          </a:xfrm>
-          <a:prstGeom prst="ellipse">
-            <a:avLst/>
-          </a:prstGeom>
-          <a:solidFill>
-            <a:srgbClr val="AE7429"/>
-          </a:solidFill>
-          <a:ln>
-            <a:noFill/>
-          </a:ln>
-        </p:spPr>
-        <p:txBody>
-          <a:bodyPr rtlCol="0" anchor="ctr"/>
-          <a:lstStyle/>
-          <a:p>
-            <a:pPr algn="ctr"/>
-          </a:p>
-        </p:txBody>
-      </p:sp>
-      <p:sp>
-        <p:nvSpPr>
-          <p:cNvPr id="9" name="장식"/>
-          <p:cNvSpPr/>
-          <p:nvPr/>
-        </p:nvSpPr>
-        <p:spPr>
-          <a:xfrm>
-            <a:off x="9592789" y="299863"/>
-            <a:ext cx="236902" cy="236902"/>
-          </a:xfrm>
-          <a:prstGeom prst="ellipse">
-            <a:avLst/>
-          </a:prstGeom>
-          <a:solidFill>
-            <a:srgbClr val="F5E3CC"/>
-          </a:solidFill>
-          <a:ln>
-            <a:noFill/>
-          </a:ln>
-        </p:spPr>
-        <p:txBody>
-          <a:bodyPr rtlCol="0" anchor="ctr"/>
-          <a:lstStyle/>
-          <a:p>
-            <a:pPr algn="ctr"/>
-          </a:p>
-        </p:txBody>
-      </p:sp>
-      <p:sp>
-        <p:nvSpPr>
-          <p:cNvPr id="10" name="장식"/>
-          <p:cNvSpPr/>
-          <p:nvPr/>
-        </p:nvSpPr>
-        <p:spPr>
-          <a:xfrm>
-            <a:off x="11671528" y="2282743"/>
-            <a:ext cx="391317" cy="391317"/>
-          </a:xfrm>
-          <a:prstGeom prst="ellipse">
-            <a:avLst/>
-          </a:prstGeom>
-          <a:solidFill>
-            <a:srgbClr val="3B8B91"/>
-          </a:solidFill>
-          <a:ln>
-            <a:noFill/>
-          </a:ln>
-        </p:spPr>
-        <p:txBody>
-          <a:bodyPr rtlCol="0" anchor="ctr"/>
-          <a:lstStyle/>
-          <a:p>
-            <a:pPr algn="ctr"/>
-          </a:p>
-        </p:txBody>
-      </p:sp>
-      <p:sp>
-        <p:nvSpPr>
-          <p:cNvPr id="11" name="장식"/>
-          <p:cNvSpPr/>
-          <p:nvPr/>
-        </p:nvSpPr>
-        <p:spPr>
-          <a:xfrm>
-            <a:off x="10999413" y="442115"/>
-            <a:ext cx="455801" cy="455801"/>
-          </a:xfrm>
-          <a:prstGeom prst="ellipse">
-            <a:avLst/>
-          </a:prstGeom>
-          <a:solidFill>
-            <a:srgbClr val="AE7429"/>
-          </a:solidFill>
-          <a:ln>
-            <a:noFill/>
-          </a:ln>
-        </p:spPr>
-        <p:txBody>
-          <a:bodyPr rtlCol="0" anchor="ctr"/>
-          <a:lstStyle/>
-          <a:p>
-            <a:pPr algn="ctr"/>
-          </a:p>
-        </p:txBody>
-      </p:sp>
-      <p:sp>
-        <p:nvSpPr>
-          <p:cNvPr id="12" name="장식"/>
-          <p:cNvSpPr/>
-          <p:nvPr/>
-        </p:nvSpPr>
-        <p:spPr>
-          <a:xfrm>
-            <a:off x="10212933" y="489281"/>
-            <a:ext cx="358123" cy="358123"/>
-          </a:xfrm>
-          <a:prstGeom prst="ellipse">
-            <a:avLst/>
-          </a:prstGeom>
-          <a:solidFill>
-            <a:srgbClr val="F5E3CC"/>
-          </a:solidFill>
-          <a:ln>
-            <a:noFill/>
-          </a:ln>
-        </p:spPr>
-        <p:txBody>
-          <a:bodyPr rtlCol="0" anchor="ctr"/>
-          <a:lstStyle/>
-          <a:p>
-            <a:pPr algn="ctr"/>
-          </a:p>
-        </p:txBody>
-      </p:sp>
-      <p:sp>
-        <p:nvSpPr>
-          <p:cNvPr id="13" name="장식"/>
-          <p:cNvSpPr/>
-          <p:nvPr/>
-        </p:nvSpPr>
-        <p:spPr>
-          <a:xfrm>
-            <a:off x="11865382" y="1333302"/>
-            <a:ext cx="269303" cy="269303"/>
-          </a:xfrm>
-          <a:prstGeom prst="ellipse">
-            <a:avLst/>
-          </a:prstGeom>
-          <a:solidFill>
-            <a:srgbClr val="3B8B91"/>
-          </a:solidFill>
-          <a:ln>
-            <a:noFill/>
-          </a:ln>
-        </p:spPr>
-        <p:txBody>
-          <a:bodyPr rtlCol="0" anchor="ctr"/>
-          <a:lstStyle/>
-          <a:p>
-            <a:pPr algn="ctr"/>
-          </a:p>
-        </p:txBody>
-      </p:sp>
-      <p:sp>
-        <p:nvSpPr>
-          <p:cNvPr id="14" name="장식"/>
-          <p:cNvSpPr/>
-          <p:nvPr/>
-        </p:nvSpPr>
-        <p:spPr>
-          <a:xfrm>
-            <a:off x="11308724" y="1757165"/>
-            <a:ext cx="317138" cy="317138"/>
-          </a:xfrm>
-          <a:prstGeom prst="ellipse">
-            <a:avLst/>
-          </a:prstGeom>
-          <a:solidFill>
-            <a:srgbClr val="AE7429"/>
-          </a:solidFill>
-          <a:ln>
-            <a:noFill/>
-          </a:ln>
-        </p:spPr>
-        <p:txBody>
-          <a:bodyPr rtlCol="0" anchor="ctr"/>
-          <a:lstStyle/>
-          <a:p>
-            <a:pPr algn="ctr"/>
-          </a:p>
-        </p:txBody>
-      </p:sp>
-      <p:sp>
-        <p:nvSpPr>
-          <p:cNvPr id="15" name="장식"/>
-          <p:cNvSpPr/>
-          <p:nvPr/>
-        </p:nvSpPr>
-        <p:spPr>
-          <a:xfrm>
-            <a:off x="9664609" y="74145"/>
-            <a:ext cx="370756" cy="370756"/>
-          </a:xfrm>
-          <a:prstGeom prst="ellipse">
-            <a:avLst/>
-          </a:prstGeom>
-          <a:solidFill>
-            <a:srgbClr val="F5E3CC"/>
-          </a:solidFill>
-          <a:ln>
-            <a:noFill/>
-          </a:ln>
-        </p:spPr>
-        <p:txBody>
-          <a:bodyPr rtlCol="0" anchor="ctr"/>
-          <a:lstStyle/>
-          <a:p>
-            <a:pPr algn="ctr"/>
-          </a:p>
-        </p:txBody>
-      </p:sp>
+        </p:spPr>
+      </p:pic>
       <p:sp>
         <p:nvSpPr>
           <p:cNvPr id="2" name="Title 1"/>
@@ -3690,8 +3329,8 @@
         </p:nvSpPr>
         <p:spPr>
           <a:xfrm>
-            <a:off x="731501" y="2167128"/>
-            <a:ext cx="8778020" cy="1609344"/>
+            <a:off x="853418" y="2057400"/>
+            <a:ext cx="6095847" cy="1554480"/>
           </a:xfrm>
         </p:spPr>
         <p:txBody>
@@ -3708,7 +3347,7 @@
             <a:r>
               <a:rPr sz="3600" b="1" i="0">
                 <a:solidFill>
-                  <a:srgbClr val="FFFFFF"/>
+                  <a:srgbClr val="5B3D15"/>
                 </a:solidFill>
               </a:rPr>
               <a:t>발표 제목을 입력하세요</a:t>
@@ -3718,14 +3357,14 @@
       </p:sp>
       <p:sp>
         <p:nvSpPr>
-          <p:cNvPr id="16" name="한 줄 문구"/>
+          <p:cNvPr id="4" name="한 줄 문구"/>
           <p:cNvSpPr txBox="1"/>
           <p:nvPr/>
         </p:nvSpPr>
         <p:spPr>
           <a:xfrm>
-            <a:off x="731501" y="4160520"/>
-            <a:ext cx="8534186" cy="822960"/>
+            <a:off x="853418" y="3749039"/>
+            <a:ext cx="6095847" cy="822960"/>
           </a:xfrm>
           <a:prstGeom prst="rect">
             <a:avLst/>
@@ -3749,21 +3388,21 @@
                   <a:srgbClr val="5B3D15"/>
                 </a:solidFill>
               </a:rPr>
-              <a:t>따뜻한 붕어빵 같은 이야기 한 봉지</a:t>
-            </a:r>
-          </a:p>
-        </p:txBody>
-      </p:sp>
-      <p:sp>
-        <p:nvSpPr>
-          <p:cNvPr id="17" name="안내 문구"/>
+              <a:t>고마운 분들 이름을 한 장에 담았습니다</a:t>
+            </a:r>
+          </a:p>
+        </p:txBody>
+      </p:sp>
+      <p:sp>
+        <p:nvSpPr>
+          <p:cNvPr id="5" name="안내 문구"/>
           <p:cNvSpPr txBox="1"/>
           <p:nvPr/>
         </p:nvSpPr>
         <p:spPr>
           <a:xfrm>
-            <a:off x="731501" y="5029200"/>
-            <a:ext cx="8534186" cy="914400"/>
+            <a:off x="853418" y="4617720"/>
+            <a:ext cx="6095847" cy="914400"/>
           </a:xfrm>
           <a:prstGeom prst="rect">
             <a:avLst/>
@@ -3802,7 +3441,7 @@
                   <a:srgbClr val="666666"/>
                 </a:solidFill>
               </a:rPr>
-              <a:t>2026. 00. 00</a:t>
+              <a:t>2027. 00. 00</a:t>
             </a:r>
           </a:p>
         </p:txBody>
@@ -3864,325 +3503,6 @@
       </p:sp>
       <p:sp>
         <p:nvSpPr>
-          <p:cNvPr id="4" name="장식"/>
-          <p:cNvSpPr/>
-          <p:nvPr/>
-        </p:nvSpPr>
-        <p:spPr>
-          <a:xfrm>
-            <a:off x="10691076" y="489607"/>
-            <a:ext cx="195353" cy="195353"/>
-          </a:xfrm>
-          <a:prstGeom prst="ellipse">
-            <a:avLst/>
-          </a:prstGeom>
-          <a:solidFill>
-            <a:srgbClr val="AE7429"/>
-          </a:solidFill>
-          <a:ln>
-            <a:noFill/>
-          </a:ln>
-        </p:spPr>
-        <p:txBody>
-          <a:bodyPr rtlCol="0" anchor="ctr"/>
-          <a:lstStyle/>
-          <a:p>
-            <a:pPr algn="ctr"/>
-          </a:p>
-        </p:txBody>
-      </p:sp>
-      <p:sp>
-        <p:nvSpPr>
-          <p:cNvPr id="5" name="장식"/>
-          <p:cNvSpPr/>
-          <p:nvPr/>
-        </p:nvSpPr>
-        <p:spPr>
-          <a:xfrm>
-            <a:off x="11265390" y="555182"/>
-            <a:ext cx="118957" cy="118957"/>
-          </a:xfrm>
-          <a:prstGeom prst="ellipse">
-            <a:avLst/>
-          </a:prstGeom>
-          <a:solidFill>
-            <a:srgbClr val="F5E3CC"/>
-          </a:solidFill>
-          <a:ln>
-            <a:noFill/>
-          </a:ln>
-        </p:spPr>
-        <p:txBody>
-          <a:bodyPr rtlCol="0" anchor="ctr"/>
-          <a:lstStyle/>
-          <a:p>
-            <a:pPr algn="ctr"/>
-          </a:p>
-        </p:txBody>
-      </p:sp>
-      <p:sp>
-        <p:nvSpPr>
-          <p:cNvPr id="6" name="장식"/>
-          <p:cNvSpPr/>
-          <p:nvPr/>
-        </p:nvSpPr>
-        <p:spPr>
-          <a:xfrm>
-            <a:off x="11546210" y="1260630"/>
-            <a:ext cx="126058" cy="126058"/>
-          </a:xfrm>
-          <a:prstGeom prst="ellipse">
-            <a:avLst/>
-          </a:prstGeom>
-          <a:solidFill>
-            <a:srgbClr val="3B8B91"/>
-          </a:solidFill>
-          <a:ln>
-            <a:noFill/>
-          </a:ln>
-        </p:spPr>
-        <p:txBody>
-          <a:bodyPr rtlCol="0" anchor="ctr"/>
-          <a:lstStyle/>
-          <a:p>
-            <a:pPr algn="ctr"/>
-          </a:p>
-        </p:txBody>
-      </p:sp>
-      <p:sp>
-        <p:nvSpPr>
-          <p:cNvPr id="7" name="장식"/>
-          <p:cNvSpPr/>
-          <p:nvPr/>
-        </p:nvSpPr>
-        <p:spPr>
-          <a:xfrm>
-            <a:off x="11377933" y="601087"/>
-            <a:ext cx="93564" cy="93564"/>
-          </a:xfrm>
-          <a:prstGeom prst="ellipse">
-            <a:avLst/>
-          </a:prstGeom>
-          <a:solidFill>
-            <a:srgbClr val="AE7429"/>
-          </a:solidFill>
-          <a:ln>
-            <a:noFill/>
-          </a:ln>
-        </p:spPr>
-        <p:txBody>
-          <a:bodyPr rtlCol="0" anchor="ctr"/>
-          <a:lstStyle/>
-          <a:p>
-            <a:pPr algn="ctr"/>
-          </a:p>
-        </p:txBody>
-      </p:sp>
-      <p:sp>
-        <p:nvSpPr>
-          <p:cNvPr id="8" name="장식"/>
-          <p:cNvSpPr/>
-          <p:nvPr/>
-        </p:nvSpPr>
-        <p:spPr>
-          <a:xfrm>
-            <a:off x="10833017" y="314922"/>
-            <a:ext cx="102193" cy="102193"/>
-          </a:xfrm>
-          <a:prstGeom prst="ellipse">
-            <a:avLst/>
-          </a:prstGeom>
-          <a:solidFill>
-            <a:srgbClr val="F5E3CC"/>
-          </a:solidFill>
-          <a:ln>
-            <a:noFill/>
-          </a:ln>
-        </p:spPr>
-        <p:txBody>
-          <a:bodyPr rtlCol="0" anchor="ctr"/>
-          <a:lstStyle/>
-          <a:p>
-            <a:pPr algn="ctr"/>
-          </a:p>
-        </p:txBody>
-      </p:sp>
-      <p:sp>
-        <p:nvSpPr>
-          <p:cNvPr id="9" name="장식"/>
-          <p:cNvSpPr/>
-          <p:nvPr/>
-        </p:nvSpPr>
-        <p:spPr>
-          <a:xfrm>
-            <a:off x="11729729" y="1170282"/>
-            <a:ext cx="168803" cy="168803"/>
-          </a:xfrm>
-          <a:prstGeom prst="ellipse">
-            <a:avLst/>
-          </a:prstGeom>
-          <a:solidFill>
-            <a:srgbClr val="3B8B91"/>
-          </a:solidFill>
-          <a:ln>
-            <a:noFill/>
-          </a:ln>
-        </p:spPr>
-        <p:txBody>
-          <a:bodyPr rtlCol="0" anchor="ctr"/>
-          <a:lstStyle/>
-          <a:p>
-            <a:pPr algn="ctr"/>
-          </a:p>
-        </p:txBody>
-      </p:sp>
-      <p:sp>
-        <p:nvSpPr>
-          <p:cNvPr id="10" name="장식"/>
-          <p:cNvSpPr/>
-          <p:nvPr/>
-        </p:nvSpPr>
-        <p:spPr>
-          <a:xfrm>
-            <a:off x="11439796" y="376285"/>
-            <a:ext cx="196620" cy="196620"/>
-          </a:xfrm>
-          <a:prstGeom prst="ellipse">
-            <a:avLst/>
-          </a:prstGeom>
-          <a:solidFill>
-            <a:srgbClr val="AE7429"/>
-          </a:solidFill>
-          <a:ln>
-            <a:noFill/>
-          </a:ln>
-        </p:spPr>
-        <p:txBody>
-          <a:bodyPr rtlCol="0" anchor="ctr"/>
-          <a:lstStyle/>
-          <a:p>
-            <a:pPr algn="ctr"/>
-          </a:p>
-        </p:txBody>
-      </p:sp>
-      <p:sp>
-        <p:nvSpPr>
-          <p:cNvPr id="11" name="장식"/>
-          <p:cNvSpPr/>
-          <p:nvPr/>
-        </p:nvSpPr>
-        <p:spPr>
-          <a:xfrm>
-            <a:off x="11100531" y="396632"/>
-            <a:ext cx="154484" cy="154484"/>
-          </a:xfrm>
-          <a:prstGeom prst="ellipse">
-            <a:avLst/>
-          </a:prstGeom>
-          <a:solidFill>
-            <a:srgbClr val="F5E3CC"/>
-          </a:solidFill>
-          <a:ln>
-            <a:noFill/>
-          </a:ln>
-        </p:spPr>
-        <p:txBody>
-          <a:bodyPr rtlCol="0" anchor="ctr"/>
-          <a:lstStyle/>
-          <a:p>
-            <a:pPr algn="ctr"/>
-          </a:p>
-        </p:txBody>
-      </p:sp>
-      <p:sp>
-        <p:nvSpPr>
-          <p:cNvPr id="12" name="장식"/>
-          <p:cNvSpPr/>
-          <p:nvPr/>
-        </p:nvSpPr>
-        <p:spPr>
-          <a:xfrm>
-            <a:off x="11813352" y="760719"/>
-            <a:ext cx="116170" cy="116170"/>
-          </a:xfrm>
-          <a:prstGeom prst="ellipse">
-            <a:avLst/>
-          </a:prstGeom>
-          <a:solidFill>
-            <a:srgbClr val="3B8B91"/>
-          </a:solidFill>
-          <a:ln>
-            <a:noFill/>
-          </a:ln>
-        </p:spPr>
-        <p:txBody>
-          <a:bodyPr rtlCol="0" anchor="ctr"/>
-          <a:lstStyle/>
-          <a:p>
-            <a:pPr algn="ctr"/>
-          </a:p>
-        </p:txBody>
-      </p:sp>
-      <p:sp>
-        <p:nvSpPr>
-          <p:cNvPr id="13" name="장식"/>
-          <p:cNvSpPr/>
-          <p:nvPr/>
-        </p:nvSpPr>
-        <p:spPr>
-          <a:xfrm>
-            <a:off x="11573225" y="943562"/>
-            <a:ext cx="136804" cy="136804"/>
-          </a:xfrm>
-          <a:prstGeom prst="ellipse">
-            <a:avLst/>
-          </a:prstGeom>
-          <a:solidFill>
-            <a:srgbClr val="AE7429"/>
-          </a:solidFill>
-          <a:ln>
-            <a:noFill/>
-          </a:ln>
-        </p:spPr>
-        <p:txBody>
-          <a:bodyPr rtlCol="0" anchor="ctr"/>
-          <a:lstStyle/>
-          <a:p>
-            <a:pPr algn="ctr"/>
-          </a:p>
-        </p:txBody>
-      </p:sp>
-      <p:sp>
-        <p:nvSpPr>
-          <p:cNvPr id="14" name="장식"/>
-          <p:cNvSpPr/>
-          <p:nvPr/>
-        </p:nvSpPr>
-        <p:spPr>
-          <a:xfrm>
-            <a:off x="10863999" y="217553"/>
-            <a:ext cx="159934" cy="159934"/>
-          </a:xfrm>
-          <a:prstGeom prst="ellipse">
-            <a:avLst/>
-          </a:prstGeom>
-          <a:solidFill>
-            <a:srgbClr val="F5E3CC"/>
-          </a:solidFill>
-          <a:ln>
-            <a:noFill/>
-          </a:ln>
-        </p:spPr>
-        <p:txBody>
-          <a:bodyPr rtlCol="0" anchor="ctr"/>
-          <a:lstStyle/>
-          <a:p>
-            <a:pPr algn="ctr"/>
-          </a:p>
-        </p:txBody>
-      </p:sp>
-      <p:sp>
-        <p:nvSpPr>
           <p:cNvPr id="2" name="Title 1"/>
           <p:cNvSpPr>
             <a:spLocks noGrp="1"/>
@@ -4221,7 +3541,7 @@
       </p:sp>
       <p:sp>
         <p:nvSpPr>
-          <p:cNvPr id="15" name="줄 1"/>
+          <p:cNvPr id="4" name="줄 1"/>
           <p:cNvSpPr/>
           <p:nvPr/>
         </p:nvSpPr>
@@ -4254,7 +3574,7 @@
       </p:sp>
       <p:sp>
         <p:nvSpPr>
-          <p:cNvPr id="16" name="번호 1"/>
+          <p:cNvPr id="5" name="번호 1"/>
           <p:cNvSpPr/>
           <p:nvPr/>
         </p:nvSpPr>
@@ -4297,7 +3617,7 @@
       </p:sp>
       <p:sp>
         <p:nvSpPr>
-          <p:cNvPr id="17" name="TextBox 16"/>
+          <p:cNvPr id="6" name="TextBox 5"/>
           <p:cNvSpPr txBox="1"/>
           <p:nvPr/>
         </p:nvSpPr>
@@ -4335,7 +3655,7 @@
       </p:sp>
       <p:sp>
         <p:nvSpPr>
-          <p:cNvPr id="18" name="TextBox 17"/>
+          <p:cNvPr id="7" name="TextBox 6"/>
           <p:cNvSpPr txBox="1"/>
           <p:nvPr/>
         </p:nvSpPr>
@@ -4373,7 +3693,7 @@
       </p:sp>
       <p:sp>
         <p:nvSpPr>
-          <p:cNvPr id="19" name="줄 2"/>
+          <p:cNvPr id="8" name="줄 2"/>
           <p:cNvSpPr/>
           <p:nvPr/>
         </p:nvSpPr>
@@ -4406,7 +3726,7 @@
       </p:sp>
       <p:sp>
         <p:nvSpPr>
-          <p:cNvPr id="20" name="번호 2"/>
+          <p:cNvPr id="9" name="번호 2"/>
           <p:cNvSpPr/>
           <p:nvPr/>
         </p:nvSpPr>
@@ -4449,7 +3769,7 @@
       </p:sp>
       <p:sp>
         <p:nvSpPr>
-          <p:cNvPr id="21" name="TextBox 20"/>
+          <p:cNvPr id="10" name="TextBox 9"/>
           <p:cNvSpPr txBox="1"/>
           <p:nvPr/>
         </p:nvSpPr>
@@ -4487,7 +3807,7 @@
       </p:sp>
       <p:sp>
         <p:nvSpPr>
-          <p:cNvPr id="22" name="TextBox 21"/>
+          <p:cNvPr id="11" name="TextBox 10"/>
           <p:cNvSpPr txBox="1"/>
           <p:nvPr/>
         </p:nvSpPr>
@@ -4525,7 +3845,7 @@
       </p:sp>
       <p:sp>
         <p:nvSpPr>
-          <p:cNvPr id="23" name="줄 3"/>
+          <p:cNvPr id="12" name="줄 3"/>
           <p:cNvSpPr/>
           <p:nvPr/>
         </p:nvSpPr>
@@ -4558,7 +3878,7 @@
       </p:sp>
       <p:sp>
         <p:nvSpPr>
-          <p:cNvPr id="24" name="번호 3"/>
+          <p:cNvPr id="13" name="번호 3"/>
           <p:cNvSpPr/>
           <p:nvPr/>
         </p:nvSpPr>
@@ -4601,7 +3921,7 @@
       </p:sp>
       <p:sp>
         <p:nvSpPr>
-          <p:cNvPr id="25" name="TextBox 24"/>
+          <p:cNvPr id="14" name="TextBox 13"/>
           <p:cNvSpPr txBox="1"/>
           <p:nvPr/>
         </p:nvSpPr>
@@ -4639,7 +3959,7 @@
       </p:sp>
       <p:sp>
         <p:nvSpPr>
-          <p:cNvPr id="26" name="TextBox 25"/>
+          <p:cNvPr id="15" name="TextBox 14"/>
           <p:cNvSpPr txBox="1"/>
           <p:nvPr/>
         </p:nvSpPr>
@@ -4677,7 +3997,7 @@
       </p:sp>
       <p:sp>
         <p:nvSpPr>
-          <p:cNvPr id="27" name="줄 4"/>
+          <p:cNvPr id="16" name="줄 4"/>
           <p:cNvSpPr/>
           <p:nvPr/>
         </p:nvSpPr>
@@ -4710,7 +4030,7 @@
       </p:sp>
       <p:sp>
         <p:nvSpPr>
-          <p:cNvPr id="28" name="번호 4"/>
+          <p:cNvPr id="17" name="번호 4"/>
           <p:cNvSpPr/>
           <p:nvPr/>
         </p:nvSpPr>
@@ -4753,7 +4073,7 @@
       </p:sp>
       <p:sp>
         <p:nvSpPr>
-          <p:cNvPr id="29" name="TextBox 28"/>
+          <p:cNvPr id="18" name="TextBox 17"/>
           <p:cNvSpPr txBox="1"/>
           <p:nvPr/>
         </p:nvSpPr>
@@ -4791,7 +4111,7 @@
       </p:sp>
       <p:sp>
         <p:nvSpPr>
-          <p:cNvPr id="30" name="TextBox 29"/>
+          <p:cNvPr id="19" name="TextBox 18"/>
           <p:cNvSpPr txBox="1"/>
           <p:nvPr/>
         </p:nvSpPr>
@@ -4884,325 +4204,6 @@
       </p:sp>
       <p:sp>
         <p:nvSpPr>
-          <p:cNvPr id="4" name="장식"/>
-          <p:cNvSpPr/>
-          <p:nvPr/>
-        </p:nvSpPr>
-        <p:spPr>
-          <a:xfrm>
-            <a:off x="10691076" y="489607"/>
-            <a:ext cx="195353" cy="195353"/>
-          </a:xfrm>
-          <a:prstGeom prst="ellipse">
-            <a:avLst/>
-          </a:prstGeom>
-          <a:solidFill>
-            <a:srgbClr val="AE7429"/>
-          </a:solidFill>
-          <a:ln>
-            <a:noFill/>
-          </a:ln>
-        </p:spPr>
-        <p:txBody>
-          <a:bodyPr rtlCol="0" anchor="ctr"/>
-          <a:lstStyle/>
-          <a:p>
-            <a:pPr algn="ctr"/>
-          </a:p>
-        </p:txBody>
-      </p:sp>
-      <p:sp>
-        <p:nvSpPr>
-          <p:cNvPr id="5" name="장식"/>
-          <p:cNvSpPr/>
-          <p:nvPr/>
-        </p:nvSpPr>
-        <p:spPr>
-          <a:xfrm>
-            <a:off x="11265390" y="555182"/>
-            <a:ext cx="118957" cy="118957"/>
-          </a:xfrm>
-          <a:prstGeom prst="ellipse">
-            <a:avLst/>
-          </a:prstGeom>
-          <a:solidFill>
-            <a:srgbClr val="F5E3CC"/>
-          </a:solidFill>
-          <a:ln>
-            <a:noFill/>
-          </a:ln>
-        </p:spPr>
-        <p:txBody>
-          <a:bodyPr rtlCol="0" anchor="ctr"/>
-          <a:lstStyle/>
-          <a:p>
-            <a:pPr algn="ctr"/>
-          </a:p>
-        </p:txBody>
-      </p:sp>
-      <p:sp>
-        <p:nvSpPr>
-          <p:cNvPr id="6" name="장식"/>
-          <p:cNvSpPr/>
-          <p:nvPr/>
-        </p:nvSpPr>
-        <p:spPr>
-          <a:xfrm>
-            <a:off x="11546210" y="1260630"/>
-            <a:ext cx="126058" cy="126058"/>
-          </a:xfrm>
-          <a:prstGeom prst="ellipse">
-            <a:avLst/>
-          </a:prstGeom>
-          <a:solidFill>
-            <a:srgbClr val="3B8B91"/>
-          </a:solidFill>
-          <a:ln>
-            <a:noFill/>
-          </a:ln>
-        </p:spPr>
-        <p:txBody>
-          <a:bodyPr rtlCol="0" anchor="ctr"/>
-          <a:lstStyle/>
-          <a:p>
-            <a:pPr algn="ctr"/>
-          </a:p>
-        </p:txBody>
-      </p:sp>
-      <p:sp>
-        <p:nvSpPr>
-          <p:cNvPr id="7" name="장식"/>
-          <p:cNvSpPr/>
-          <p:nvPr/>
-        </p:nvSpPr>
-        <p:spPr>
-          <a:xfrm>
-            <a:off x="11377933" y="601087"/>
-            <a:ext cx="93564" cy="93564"/>
-          </a:xfrm>
-          <a:prstGeom prst="ellipse">
-            <a:avLst/>
-          </a:prstGeom>
-          <a:solidFill>
-            <a:srgbClr val="AE7429"/>
-          </a:solidFill>
-          <a:ln>
-            <a:noFill/>
-          </a:ln>
-        </p:spPr>
-        <p:txBody>
-          <a:bodyPr rtlCol="0" anchor="ctr"/>
-          <a:lstStyle/>
-          <a:p>
-            <a:pPr algn="ctr"/>
-          </a:p>
-        </p:txBody>
-      </p:sp>
-      <p:sp>
-        <p:nvSpPr>
-          <p:cNvPr id="8" name="장식"/>
-          <p:cNvSpPr/>
-          <p:nvPr/>
-        </p:nvSpPr>
-        <p:spPr>
-          <a:xfrm>
-            <a:off x="10833017" y="314922"/>
-            <a:ext cx="102193" cy="102193"/>
-          </a:xfrm>
-          <a:prstGeom prst="ellipse">
-            <a:avLst/>
-          </a:prstGeom>
-          <a:solidFill>
-            <a:srgbClr val="F5E3CC"/>
-          </a:solidFill>
-          <a:ln>
-            <a:noFill/>
-          </a:ln>
-        </p:spPr>
-        <p:txBody>
-          <a:bodyPr rtlCol="0" anchor="ctr"/>
-          <a:lstStyle/>
-          <a:p>
-            <a:pPr algn="ctr"/>
-          </a:p>
-        </p:txBody>
-      </p:sp>
-      <p:sp>
-        <p:nvSpPr>
-          <p:cNvPr id="9" name="장식"/>
-          <p:cNvSpPr/>
-          <p:nvPr/>
-        </p:nvSpPr>
-        <p:spPr>
-          <a:xfrm>
-            <a:off x="11729729" y="1170282"/>
-            <a:ext cx="168803" cy="168803"/>
-          </a:xfrm>
-          <a:prstGeom prst="ellipse">
-            <a:avLst/>
-          </a:prstGeom>
-          <a:solidFill>
-            <a:srgbClr val="3B8B91"/>
-          </a:solidFill>
-          <a:ln>
-            <a:noFill/>
-          </a:ln>
-        </p:spPr>
-        <p:txBody>
-          <a:bodyPr rtlCol="0" anchor="ctr"/>
-          <a:lstStyle/>
-          <a:p>
-            <a:pPr algn="ctr"/>
-          </a:p>
-        </p:txBody>
-      </p:sp>
-      <p:sp>
-        <p:nvSpPr>
-          <p:cNvPr id="10" name="장식"/>
-          <p:cNvSpPr/>
-          <p:nvPr/>
-        </p:nvSpPr>
-        <p:spPr>
-          <a:xfrm>
-            <a:off x="11439796" y="376285"/>
-            <a:ext cx="196620" cy="196620"/>
-          </a:xfrm>
-          <a:prstGeom prst="ellipse">
-            <a:avLst/>
-          </a:prstGeom>
-          <a:solidFill>
-            <a:srgbClr val="AE7429"/>
-          </a:solidFill>
-          <a:ln>
-            <a:noFill/>
-          </a:ln>
-        </p:spPr>
-        <p:txBody>
-          <a:bodyPr rtlCol="0" anchor="ctr"/>
-          <a:lstStyle/>
-          <a:p>
-            <a:pPr algn="ctr"/>
-          </a:p>
-        </p:txBody>
-      </p:sp>
-      <p:sp>
-        <p:nvSpPr>
-          <p:cNvPr id="11" name="장식"/>
-          <p:cNvSpPr/>
-          <p:nvPr/>
-        </p:nvSpPr>
-        <p:spPr>
-          <a:xfrm>
-            <a:off x="11100531" y="396632"/>
-            <a:ext cx="154484" cy="154484"/>
-          </a:xfrm>
-          <a:prstGeom prst="ellipse">
-            <a:avLst/>
-          </a:prstGeom>
-          <a:solidFill>
-            <a:srgbClr val="F5E3CC"/>
-          </a:solidFill>
-          <a:ln>
-            <a:noFill/>
-          </a:ln>
-        </p:spPr>
-        <p:txBody>
-          <a:bodyPr rtlCol="0" anchor="ctr"/>
-          <a:lstStyle/>
-          <a:p>
-            <a:pPr algn="ctr"/>
-          </a:p>
-        </p:txBody>
-      </p:sp>
-      <p:sp>
-        <p:nvSpPr>
-          <p:cNvPr id="12" name="장식"/>
-          <p:cNvSpPr/>
-          <p:nvPr/>
-        </p:nvSpPr>
-        <p:spPr>
-          <a:xfrm>
-            <a:off x="11813352" y="760719"/>
-            <a:ext cx="116170" cy="116170"/>
-          </a:xfrm>
-          <a:prstGeom prst="ellipse">
-            <a:avLst/>
-          </a:prstGeom>
-          <a:solidFill>
-            <a:srgbClr val="3B8B91"/>
-          </a:solidFill>
-          <a:ln>
-            <a:noFill/>
-          </a:ln>
-        </p:spPr>
-        <p:txBody>
-          <a:bodyPr rtlCol="0" anchor="ctr"/>
-          <a:lstStyle/>
-          <a:p>
-            <a:pPr algn="ctr"/>
-          </a:p>
-        </p:txBody>
-      </p:sp>
-      <p:sp>
-        <p:nvSpPr>
-          <p:cNvPr id="13" name="장식"/>
-          <p:cNvSpPr/>
-          <p:nvPr/>
-        </p:nvSpPr>
-        <p:spPr>
-          <a:xfrm>
-            <a:off x="11573225" y="943562"/>
-            <a:ext cx="136804" cy="136804"/>
-          </a:xfrm>
-          <a:prstGeom prst="ellipse">
-            <a:avLst/>
-          </a:prstGeom>
-          <a:solidFill>
-            <a:srgbClr val="AE7429"/>
-          </a:solidFill>
-          <a:ln>
-            <a:noFill/>
-          </a:ln>
-        </p:spPr>
-        <p:txBody>
-          <a:bodyPr rtlCol="0" anchor="ctr"/>
-          <a:lstStyle/>
-          <a:p>
-            <a:pPr algn="ctr"/>
-          </a:p>
-        </p:txBody>
-      </p:sp>
-      <p:sp>
-        <p:nvSpPr>
-          <p:cNvPr id="14" name="장식"/>
-          <p:cNvSpPr/>
-          <p:nvPr/>
-        </p:nvSpPr>
-        <p:spPr>
-          <a:xfrm>
-            <a:off x="10863999" y="217553"/>
-            <a:ext cx="159934" cy="159934"/>
-          </a:xfrm>
-          <a:prstGeom prst="ellipse">
-            <a:avLst/>
-          </a:prstGeom>
-          <a:solidFill>
-            <a:srgbClr val="F5E3CC"/>
-          </a:solidFill>
-          <a:ln>
-            <a:noFill/>
-          </a:ln>
-        </p:spPr>
-        <p:txBody>
-          <a:bodyPr rtlCol="0" anchor="ctr"/>
-          <a:lstStyle/>
-          <a:p>
-            <a:pPr algn="ctr"/>
-          </a:p>
-        </p:txBody>
-      </p:sp>
-      <p:sp>
-        <p:nvSpPr>
           <p:cNvPr id="2" name="Title 1"/>
           <p:cNvSpPr>
             <a:spLocks noGrp="1"/>
@@ -5241,7 +4242,7 @@
       </p:sp>
       <p:sp>
         <p:nvSpPr>
-          <p:cNvPr id="15" name="핵심 문장"/>
+          <p:cNvPr id="4" name="핵심 문장"/>
           <p:cNvSpPr txBox="1"/>
           <p:nvPr/>
         </p:nvSpPr>
@@ -5279,7 +4280,7 @@
       </p:sp>
       <p:sp>
         <p:nvSpPr>
-          <p:cNvPr id="16" name="카드 1"/>
+          <p:cNvPr id="5" name="카드 1"/>
           <p:cNvSpPr/>
           <p:nvPr/>
         </p:nvSpPr>
@@ -5312,7 +4313,7 @@
       </p:sp>
       <p:sp>
         <p:nvSpPr>
-          <p:cNvPr id="17" name="번호 1"/>
+          <p:cNvPr id="6" name="번호 1"/>
           <p:cNvSpPr/>
           <p:nvPr/>
         </p:nvSpPr>
@@ -5355,7 +4356,7 @@
       </p:sp>
       <p:sp>
         <p:nvSpPr>
-          <p:cNvPr id="18" name="TextBox 17"/>
+          <p:cNvPr id="7" name="TextBox 6"/>
           <p:cNvSpPr txBox="1"/>
           <p:nvPr/>
         </p:nvSpPr>
@@ -5393,7 +4394,7 @@
       </p:sp>
       <p:sp>
         <p:nvSpPr>
-          <p:cNvPr id="19" name="TextBox 18"/>
+          <p:cNvPr id="8" name="TextBox 7"/>
           <p:cNvSpPr txBox="1"/>
           <p:nvPr/>
         </p:nvSpPr>
@@ -5446,7 +4447,7 @@
       </p:sp>
       <p:sp>
         <p:nvSpPr>
-          <p:cNvPr id="20" name="카드 2"/>
+          <p:cNvPr id="9" name="카드 2"/>
           <p:cNvSpPr/>
           <p:nvPr/>
         </p:nvSpPr>
@@ -5479,7 +4480,7 @@
       </p:sp>
       <p:sp>
         <p:nvSpPr>
-          <p:cNvPr id="21" name="번호 2"/>
+          <p:cNvPr id="10" name="번호 2"/>
           <p:cNvSpPr/>
           <p:nvPr/>
         </p:nvSpPr>
@@ -5522,7 +4523,7 @@
       </p:sp>
       <p:sp>
         <p:nvSpPr>
-          <p:cNvPr id="22" name="TextBox 21"/>
+          <p:cNvPr id="11" name="TextBox 10"/>
           <p:cNvSpPr txBox="1"/>
           <p:nvPr/>
         </p:nvSpPr>
@@ -5560,7 +4561,7 @@
       </p:sp>
       <p:sp>
         <p:nvSpPr>
-          <p:cNvPr id="23" name="TextBox 22"/>
+          <p:cNvPr id="12" name="TextBox 11"/>
           <p:cNvSpPr txBox="1"/>
           <p:nvPr/>
         </p:nvSpPr>
@@ -5613,7 +4614,7 @@
       </p:sp>
       <p:sp>
         <p:nvSpPr>
-          <p:cNvPr id="24" name="카드 3"/>
+          <p:cNvPr id="13" name="카드 3"/>
           <p:cNvSpPr/>
           <p:nvPr/>
         </p:nvSpPr>
@@ -5646,7 +4647,7 @@
       </p:sp>
       <p:sp>
         <p:nvSpPr>
-          <p:cNvPr id="25" name="번호 3"/>
+          <p:cNvPr id="14" name="번호 3"/>
           <p:cNvSpPr/>
           <p:nvPr/>
         </p:nvSpPr>
@@ -5689,7 +4690,7 @@
       </p:sp>
       <p:sp>
         <p:nvSpPr>
-          <p:cNvPr id="26" name="TextBox 25"/>
+          <p:cNvPr id="15" name="TextBox 14"/>
           <p:cNvSpPr txBox="1"/>
           <p:nvPr/>
         </p:nvSpPr>
@@ -5727,7 +4728,7 @@
       </p:sp>
       <p:sp>
         <p:nvSpPr>
-          <p:cNvPr id="27" name="TextBox 26"/>
+          <p:cNvPr id="16" name="TextBox 15"/>
           <p:cNvSpPr txBox="1"/>
           <p:nvPr/>
         </p:nvSpPr>
@@ -5835,325 +4836,6 @@
       </p:sp>
       <p:sp>
         <p:nvSpPr>
-          <p:cNvPr id="4" name="장식"/>
-          <p:cNvSpPr/>
-          <p:nvPr/>
-        </p:nvSpPr>
-        <p:spPr>
-          <a:xfrm>
-            <a:off x="10691076" y="489607"/>
-            <a:ext cx="195353" cy="195353"/>
-          </a:xfrm>
-          <a:prstGeom prst="ellipse">
-            <a:avLst/>
-          </a:prstGeom>
-          <a:solidFill>
-            <a:srgbClr val="AE7429"/>
-          </a:solidFill>
-          <a:ln>
-            <a:noFill/>
-          </a:ln>
-        </p:spPr>
-        <p:txBody>
-          <a:bodyPr rtlCol="0" anchor="ctr"/>
-          <a:lstStyle/>
-          <a:p>
-            <a:pPr algn="ctr"/>
-          </a:p>
-        </p:txBody>
-      </p:sp>
-      <p:sp>
-        <p:nvSpPr>
-          <p:cNvPr id="5" name="장식"/>
-          <p:cNvSpPr/>
-          <p:nvPr/>
-        </p:nvSpPr>
-        <p:spPr>
-          <a:xfrm>
-            <a:off x="11265390" y="555182"/>
-            <a:ext cx="118957" cy="118957"/>
-          </a:xfrm>
-          <a:prstGeom prst="ellipse">
-            <a:avLst/>
-          </a:prstGeom>
-          <a:solidFill>
-            <a:srgbClr val="F5E3CC"/>
-          </a:solidFill>
-          <a:ln>
-            <a:noFill/>
-          </a:ln>
-        </p:spPr>
-        <p:txBody>
-          <a:bodyPr rtlCol="0" anchor="ctr"/>
-          <a:lstStyle/>
-          <a:p>
-            <a:pPr algn="ctr"/>
-          </a:p>
-        </p:txBody>
-      </p:sp>
-      <p:sp>
-        <p:nvSpPr>
-          <p:cNvPr id="6" name="장식"/>
-          <p:cNvSpPr/>
-          <p:nvPr/>
-        </p:nvSpPr>
-        <p:spPr>
-          <a:xfrm>
-            <a:off x="11546210" y="1260630"/>
-            <a:ext cx="126058" cy="126058"/>
-          </a:xfrm>
-          <a:prstGeom prst="ellipse">
-            <a:avLst/>
-          </a:prstGeom>
-          <a:solidFill>
-            <a:srgbClr val="3B8B91"/>
-          </a:solidFill>
-          <a:ln>
-            <a:noFill/>
-          </a:ln>
-        </p:spPr>
-        <p:txBody>
-          <a:bodyPr rtlCol="0" anchor="ctr"/>
-          <a:lstStyle/>
-          <a:p>
-            <a:pPr algn="ctr"/>
-          </a:p>
-        </p:txBody>
-      </p:sp>
-      <p:sp>
-        <p:nvSpPr>
-          <p:cNvPr id="7" name="장식"/>
-          <p:cNvSpPr/>
-          <p:nvPr/>
-        </p:nvSpPr>
-        <p:spPr>
-          <a:xfrm>
-            <a:off x="11377933" y="601087"/>
-            <a:ext cx="93564" cy="93564"/>
-          </a:xfrm>
-          <a:prstGeom prst="ellipse">
-            <a:avLst/>
-          </a:prstGeom>
-          <a:solidFill>
-            <a:srgbClr val="AE7429"/>
-          </a:solidFill>
-          <a:ln>
-            <a:noFill/>
-          </a:ln>
-        </p:spPr>
-        <p:txBody>
-          <a:bodyPr rtlCol="0" anchor="ctr"/>
-          <a:lstStyle/>
-          <a:p>
-            <a:pPr algn="ctr"/>
-          </a:p>
-        </p:txBody>
-      </p:sp>
-      <p:sp>
-        <p:nvSpPr>
-          <p:cNvPr id="8" name="장식"/>
-          <p:cNvSpPr/>
-          <p:nvPr/>
-        </p:nvSpPr>
-        <p:spPr>
-          <a:xfrm>
-            <a:off x="10833017" y="314922"/>
-            <a:ext cx="102193" cy="102193"/>
-          </a:xfrm>
-          <a:prstGeom prst="ellipse">
-            <a:avLst/>
-          </a:prstGeom>
-          <a:solidFill>
-            <a:srgbClr val="F5E3CC"/>
-          </a:solidFill>
-          <a:ln>
-            <a:noFill/>
-          </a:ln>
-        </p:spPr>
-        <p:txBody>
-          <a:bodyPr rtlCol="0" anchor="ctr"/>
-          <a:lstStyle/>
-          <a:p>
-            <a:pPr algn="ctr"/>
-          </a:p>
-        </p:txBody>
-      </p:sp>
-      <p:sp>
-        <p:nvSpPr>
-          <p:cNvPr id="9" name="장식"/>
-          <p:cNvSpPr/>
-          <p:nvPr/>
-        </p:nvSpPr>
-        <p:spPr>
-          <a:xfrm>
-            <a:off x="11729729" y="1170282"/>
-            <a:ext cx="168803" cy="168803"/>
-          </a:xfrm>
-          <a:prstGeom prst="ellipse">
-            <a:avLst/>
-          </a:prstGeom>
-          <a:solidFill>
-            <a:srgbClr val="3B8B91"/>
-          </a:solidFill>
-          <a:ln>
-            <a:noFill/>
-          </a:ln>
-        </p:spPr>
-        <p:txBody>
-          <a:bodyPr rtlCol="0" anchor="ctr"/>
-          <a:lstStyle/>
-          <a:p>
-            <a:pPr algn="ctr"/>
-          </a:p>
-        </p:txBody>
-      </p:sp>
-      <p:sp>
-        <p:nvSpPr>
-          <p:cNvPr id="10" name="장식"/>
-          <p:cNvSpPr/>
-          <p:nvPr/>
-        </p:nvSpPr>
-        <p:spPr>
-          <a:xfrm>
-            <a:off x="11439796" y="376285"/>
-            <a:ext cx="196620" cy="196620"/>
-          </a:xfrm>
-          <a:prstGeom prst="ellipse">
-            <a:avLst/>
-          </a:prstGeom>
-          <a:solidFill>
-            <a:srgbClr val="AE7429"/>
-          </a:solidFill>
-          <a:ln>
-            <a:noFill/>
-          </a:ln>
-        </p:spPr>
-        <p:txBody>
-          <a:bodyPr rtlCol="0" anchor="ctr"/>
-          <a:lstStyle/>
-          <a:p>
-            <a:pPr algn="ctr"/>
-          </a:p>
-        </p:txBody>
-      </p:sp>
-      <p:sp>
-        <p:nvSpPr>
-          <p:cNvPr id="11" name="장식"/>
-          <p:cNvSpPr/>
-          <p:nvPr/>
-        </p:nvSpPr>
-        <p:spPr>
-          <a:xfrm>
-            <a:off x="11100531" y="396632"/>
-            <a:ext cx="154484" cy="154484"/>
-          </a:xfrm>
-          <a:prstGeom prst="ellipse">
-            <a:avLst/>
-          </a:prstGeom>
-          <a:solidFill>
-            <a:srgbClr val="F5E3CC"/>
-          </a:solidFill>
-          <a:ln>
-            <a:noFill/>
-          </a:ln>
-        </p:spPr>
-        <p:txBody>
-          <a:bodyPr rtlCol="0" anchor="ctr"/>
-          <a:lstStyle/>
-          <a:p>
-            <a:pPr algn="ctr"/>
-          </a:p>
-        </p:txBody>
-      </p:sp>
-      <p:sp>
-        <p:nvSpPr>
-          <p:cNvPr id="12" name="장식"/>
-          <p:cNvSpPr/>
-          <p:nvPr/>
-        </p:nvSpPr>
-        <p:spPr>
-          <a:xfrm>
-            <a:off x="11813352" y="760719"/>
-            <a:ext cx="116170" cy="116170"/>
-          </a:xfrm>
-          <a:prstGeom prst="ellipse">
-            <a:avLst/>
-          </a:prstGeom>
-          <a:solidFill>
-            <a:srgbClr val="3B8B91"/>
-          </a:solidFill>
-          <a:ln>
-            <a:noFill/>
-          </a:ln>
-        </p:spPr>
-        <p:txBody>
-          <a:bodyPr rtlCol="0" anchor="ctr"/>
-          <a:lstStyle/>
-          <a:p>
-            <a:pPr algn="ctr"/>
-          </a:p>
-        </p:txBody>
-      </p:sp>
-      <p:sp>
-        <p:nvSpPr>
-          <p:cNvPr id="13" name="장식"/>
-          <p:cNvSpPr/>
-          <p:nvPr/>
-        </p:nvSpPr>
-        <p:spPr>
-          <a:xfrm>
-            <a:off x="11573225" y="943562"/>
-            <a:ext cx="136804" cy="136804"/>
-          </a:xfrm>
-          <a:prstGeom prst="ellipse">
-            <a:avLst/>
-          </a:prstGeom>
-          <a:solidFill>
-            <a:srgbClr val="AE7429"/>
-          </a:solidFill>
-          <a:ln>
-            <a:noFill/>
-          </a:ln>
-        </p:spPr>
-        <p:txBody>
-          <a:bodyPr rtlCol="0" anchor="ctr"/>
-          <a:lstStyle/>
-          <a:p>
-            <a:pPr algn="ctr"/>
-          </a:p>
-        </p:txBody>
-      </p:sp>
-      <p:sp>
-        <p:nvSpPr>
-          <p:cNvPr id="14" name="장식"/>
-          <p:cNvSpPr/>
-          <p:nvPr/>
-        </p:nvSpPr>
-        <p:spPr>
-          <a:xfrm>
-            <a:off x="10863999" y="217553"/>
-            <a:ext cx="159934" cy="159934"/>
-          </a:xfrm>
-          <a:prstGeom prst="ellipse">
-            <a:avLst/>
-          </a:prstGeom>
-          <a:solidFill>
-            <a:srgbClr val="F5E3CC"/>
-          </a:solidFill>
-          <a:ln>
-            <a:noFill/>
-          </a:ln>
-        </p:spPr>
-        <p:txBody>
-          <a:bodyPr rtlCol="0" anchor="ctr"/>
-          <a:lstStyle/>
-          <a:p>
-            <a:pPr algn="ctr"/>
-          </a:p>
-        </p:txBody>
-      </p:sp>
-      <p:sp>
-        <p:nvSpPr>
           <p:cNvPr id="2" name="Title 1"/>
           <p:cNvSpPr>
             <a:spLocks noGrp="1"/>
@@ -6192,7 +4874,7 @@
       </p:sp>
       <p:sp>
         <p:nvSpPr>
-          <p:cNvPr id="15" name="왼쪽 칸"/>
+          <p:cNvPr id="4" name="왼쪽 칸"/>
           <p:cNvSpPr/>
           <p:nvPr/>
         </p:nvSpPr>
@@ -6225,7 +4907,7 @@
       </p:sp>
       <p:sp>
         <p:nvSpPr>
-          <p:cNvPr id="16" name="칸 제목 바"/>
+          <p:cNvPr id="5" name="칸 제목 바"/>
           <p:cNvSpPr/>
           <p:nvPr/>
         </p:nvSpPr>
@@ -6256,7 +4938,7 @@
       </p:sp>
       <p:sp>
         <p:nvSpPr>
-          <p:cNvPr id="17" name="TextBox 16"/>
+          <p:cNvPr id="6" name="TextBox 5"/>
           <p:cNvSpPr txBox="1"/>
           <p:nvPr/>
         </p:nvSpPr>
@@ -6294,7 +4976,7 @@
       </p:sp>
       <p:sp>
         <p:nvSpPr>
-          <p:cNvPr id="18" name="TextBox 17"/>
+          <p:cNvPr id="7" name="TextBox 6"/>
           <p:cNvSpPr txBox="1"/>
           <p:nvPr/>
         </p:nvSpPr>
@@ -6377,7 +5059,7 @@
       </p:sp>
       <p:sp>
         <p:nvSpPr>
-          <p:cNvPr id="19" name="오른쪽 칸"/>
+          <p:cNvPr id="8" name="오른쪽 칸"/>
           <p:cNvSpPr/>
           <p:nvPr/>
         </p:nvSpPr>
@@ -6410,7 +5092,7 @@
       </p:sp>
       <p:sp>
         <p:nvSpPr>
-          <p:cNvPr id="20" name="칸 제목 바"/>
+          <p:cNvPr id="9" name="칸 제목 바"/>
           <p:cNvSpPr/>
           <p:nvPr/>
         </p:nvSpPr>
@@ -6441,7 +5123,7 @@
       </p:sp>
       <p:sp>
         <p:nvSpPr>
-          <p:cNvPr id="21" name="TextBox 20"/>
+          <p:cNvPr id="10" name="TextBox 9"/>
           <p:cNvSpPr txBox="1"/>
           <p:nvPr/>
         </p:nvSpPr>
@@ -6479,7 +5161,7 @@
       </p:sp>
       <p:sp>
         <p:nvSpPr>
-          <p:cNvPr id="22" name="TextBox 21"/>
+          <p:cNvPr id="11" name="TextBox 10"/>
           <p:cNvSpPr txBox="1"/>
           <p:nvPr/>
         </p:nvSpPr>
@@ -6617,325 +5299,6 @@
       </p:sp>
       <p:sp>
         <p:nvSpPr>
-          <p:cNvPr id="4" name="장식"/>
-          <p:cNvSpPr/>
-          <p:nvPr/>
-        </p:nvSpPr>
-        <p:spPr>
-          <a:xfrm>
-            <a:off x="10691076" y="489607"/>
-            <a:ext cx="195353" cy="195353"/>
-          </a:xfrm>
-          <a:prstGeom prst="ellipse">
-            <a:avLst/>
-          </a:prstGeom>
-          <a:solidFill>
-            <a:srgbClr val="AE7429"/>
-          </a:solidFill>
-          <a:ln>
-            <a:noFill/>
-          </a:ln>
-        </p:spPr>
-        <p:txBody>
-          <a:bodyPr rtlCol="0" anchor="ctr"/>
-          <a:lstStyle/>
-          <a:p>
-            <a:pPr algn="ctr"/>
-          </a:p>
-        </p:txBody>
-      </p:sp>
-      <p:sp>
-        <p:nvSpPr>
-          <p:cNvPr id="5" name="장식"/>
-          <p:cNvSpPr/>
-          <p:nvPr/>
-        </p:nvSpPr>
-        <p:spPr>
-          <a:xfrm>
-            <a:off x="11265390" y="555182"/>
-            <a:ext cx="118957" cy="118957"/>
-          </a:xfrm>
-          <a:prstGeom prst="ellipse">
-            <a:avLst/>
-          </a:prstGeom>
-          <a:solidFill>
-            <a:srgbClr val="F5E3CC"/>
-          </a:solidFill>
-          <a:ln>
-            <a:noFill/>
-          </a:ln>
-        </p:spPr>
-        <p:txBody>
-          <a:bodyPr rtlCol="0" anchor="ctr"/>
-          <a:lstStyle/>
-          <a:p>
-            <a:pPr algn="ctr"/>
-          </a:p>
-        </p:txBody>
-      </p:sp>
-      <p:sp>
-        <p:nvSpPr>
-          <p:cNvPr id="6" name="장식"/>
-          <p:cNvSpPr/>
-          <p:nvPr/>
-        </p:nvSpPr>
-        <p:spPr>
-          <a:xfrm>
-            <a:off x="11546210" y="1260630"/>
-            <a:ext cx="126058" cy="126058"/>
-          </a:xfrm>
-          <a:prstGeom prst="ellipse">
-            <a:avLst/>
-          </a:prstGeom>
-          <a:solidFill>
-            <a:srgbClr val="3B8B91"/>
-          </a:solidFill>
-          <a:ln>
-            <a:noFill/>
-          </a:ln>
-        </p:spPr>
-        <p:txBody>
-          <a:bodyPr rtlCol="0" anchor="ctr"/>
-          <a:lstStyle/>
-          <a:p>
-            <a:pPr algn="ctr"/>
-          </a:p>
-        </p:txBody>
-      </p:sp>
-      <p:sp>
-        <p:nvSpPr>
-          <p:cNvPr id="7" name="장식"/>
-          <p:cNvSpPr/>
-          <p:nvPr/>
-        </p:nvSpPr>
-        <p:spPr>
-          <a:xfrm>
-            <a:off x="11377933" y="601087"/>
-            <a:ext cx="93564" cy="93564"/>
-          </a:xfrm>
-          <a:prstGeom prst="ellipse">
-            <a:avLst/>
-          </a:prstGeom>
-          <a:solidFill>
-            <a:srgbClr val="AE7429"/>
-          </a:solidFill>
-          <a:ln>
-            <a:noFill/>
-          </a:ln>
-        </p:spPr>
-        <p:txBody>
-          <a:bodyPr rtlCol="0" anchor="ctr"/>
-          <a:lstStyle/>
-          <a:p>
-            <a:pPr algn="ctr"/>
-          </a:p>
-        </p:txBody>
-      </p:sp>
-      <p:sp>
-        <p:nvSpPr>
-          <p:cNvPr id="8" name="장식"/>
-          <p:cNvSpPr/>
-          <p:nvPr/>
-        </p:nvSpPr>
-        <p:spPr>
-          <a:xfrm>
-            <a:off x="10833017" y="314922"/>
-            <a:ext cx="102193" cy="102193"/>
-          </a:xfrm>
-          <a:prstGeom prst="ellipse">
-            <a:avLst/>
-          </a:prstGeom>
-          <a:solidFill>
-            <a:srgbClr val="F5E3CC"/>
-          </a:solidFill>
-          <a:ln>
-            <a:noFill/>
-          </a:ln>
-        </p:spPr>
-        <p:txBody>
-          <a:bodyPr rtlCol="0" anchor="ctr"/>
-          <a:lstStyle/>
-          <a:p>
-            <a:pPr algn="ctr"/>
-          </a:p>
-        </p:txBody>
-      </p:sp>
-      <p:sp>
-        <p:nvSpPr>
-          <p:cNvPr id="9" name="장식"/>
-          <p:cNvSpPr/>
-          <p:nvPr/>
-        </p:nvSpPr>
-        <p:spPr>
-          <a:xfrm>
-            <a:off x="11729729" y="1170282"/>
-            <a:ext cx="168803" cy="168803"/>
-          </a:xfrm>
-          <a:prstGeom prst="ellipse">
-            <a:avLst/>
-          </a:prstGeom>
-          <a:solidFill>
-            <a:srgbClr val="3B8B91"/>
-          </a:solidFill>
-          <a:ln>
-            <a:noFill/>
-          </a:ln>
-        </p:spPr>
-        <p:txBody>
-          <a:bodyPr rtlCol="0" anchor="ctr"/>
-          <a:lstStyle/>
-          <a:p>
-            <a:pPr algn="ctr"/>
-          </a:p>
-        </p:txBody>
-      </p:sp>
-      <p:sp>
-        <p:nvSpPr>
-          <p:cNvPr id="10" name="장식"/>
-          <p:cNvSpPr/>
-          <p:nvPr/>
-        </p:nvSpPr>
-        <p:spPr>
-          <a:xfrm>
-            <a:off x="11439796" y="376285"/>
-            <a:ext cx="196620" cy="196620"/>
-          </a:xfrm>
-          <a:prstGeom prst="ellipse">
-            <a:avLst/>
-          </a:prstGeom>
-          <a:solidFill>
-            <a:srgbClr val="AE7429"/>
-          </a:solidFill>
-          <a:ln>
-            <a:noFill/>
-          </a:ln>
-        </p:spPr>
-        <p:txBody>
-          <a:bodyPr rtlCol="0" anchor="ctr"/>
-          <a:lstStyle/>
-          <a:p>
-            <a:pPr algn="ctr"/>
-          </a:p>
-        </p:txBody>
-      </p:sp>
-      <p:sp>
-        <p:nvSpPr>
-          <p:cNvPr id="11" name="장식"/>
-          <p:cNvSpPr/>
-          <p:nvPr/>
-        </p:nvSpPr>
-        <p:spPr>
-          <a:xfrm>
-            <a:off x="11100531" y="396632"/>
-            <a:ext cx="154484" cy="154484"/>
-          </a:xfrm>
-          <a:prstGeom prst="ellipse">
-            <a:avLst/>
-          </a:prstGeom>
-          <a:solidFill>
-            <a:srgbClr val="F5E3CC"/>
-          </a:solidFill>
-          <a:ln>
-            <a:noFill/>
-          </a:ln>
-        </p:spPr>
-        <p:txBody>
-          <a:bodyPr rtlCol="0" anchor="ctr"/>
-          <a:lstStyle/>
-          <a:p>
-            <a:pPr algn="ctr"/>
-          </a:p>
-        </p:txBody>
-      </p:sp>
-      <p:sp>
-        <p:nvSpPr>
-          <p:cNvPr id="12" name="장식"/>
-          <p:cNvSpPr/>
-          <p:nvPr/>
-        </p:nvSpPr>
-        <p:spPr>
-          <a:xfrm>
-            <a:off x="11813352" y="760719"/>
-            <a:ext cx="116170" cy="116170"/>
-          </a:xfrm>
-          <a:prstGeom prst="ellipse">
-            <a:avLst/>
-          </a:prstGeom>
-          <a:solidFill>
-            <a:srgbClr val="3B8B91"/>
-          </a:solidFill>
-          <a:ln>
-            <a:noFill/>
-          </a:ln>
-        </p:spPr>
-        <p:txBody>
-          <a:bodyPr rtlCol="0" anchor="ctr"/>
-          <a:lstStyle/>
-          <a:p>
-            <a:pPr algn="ctr"/>
-          </a:p>
-        </p:txBody>
-      </p:sp>
-      <p:sp>
-        <p:nvSpPr>
-          <p:cNvPr id="13" name="장식"/>
-          <p:cNvSpPr/>
-          <p:nvPr/>
-        </p:nvSpPr>
-        <p:spPr>
-          <a:xfrm>
-            <a:off x="11573225" y="943562"/>
-            <a:ext cx="136804" cy="136804"/>
-          </a:xfrm>
-          <a:prstGeom prst="ellipse">
-            <a:avLst/>
-          </a:prstGeom>
-          <a:solidFill>
-            <a:srgbClr val="AE7429"/>
-          </a:solidFill>
-          <a:ln>
-            <a:noFill/>
-          </a:ln>
-        </p:spPr>
-        <p:txBody>
-          <a:bodyPr rtlCol="0" anchor="ctr"/>
-          <a:lstStyle/>
-          <a:p>
-            <a:pPr algn="ctr"/>
-          </a:p>
-        </p:txBody>
-      </p:sp>
-      <p:sp>
-        <p:nvSpPr>
-          <p:cNvPr id="14" name="장식"/>
-          <p:cNvSpPr/>
-          <p:nvPr/>
-        </p:nvSpPr>
-        <p:spPr>
-          <a:xfrm>
-            <a:off x="10863999" y="217553"/>
-            <a:ext cx="159934" cy="159934"/>
-          </a:xfrm>
-          <a:prstGeom prst="ellipse">
-            <a:avLst/>
-          </a:prstGeom>
-          <a:solidFill>
-            <a:srgbClr val="F5E3CC"/>
-          </a:solidFill>
-          <a:ln>
-            <a:noFill/>
-          </a:ln>
-        </p:spPr>
-        <p:txBody>
-          <a:bodyPr rtlCol="0" anchor="ctr"/>
-          <a:lstStyle/>
-          <a:p>
-            <a:pPr algn="ctr"/>
-          </a:p>
-        </p:txBody>
-      </p:sp>
-      <p:sp>
-        <p:nvSpPr>
           <p:cNvPr id="2" name="Title 1"/>
           <p:cNvSpPr>
             <a:spLocks noGrp="1"/>
@@ -6974,7 +5337,7 @@
       </p:sp>
       <p:graphicFrame>
         <p:nvGraphicFramePr>
-          <p:cNvPr id="15" name="표"/>
+          <p:cNvPr id="4" name="표"/>
           <p:cNvGraphicFramePr>
             <a:graphicFrameLocks noGrp="1"/>
           </p:cNvGraphicFramePr>
@@ -8127,14 +6490,6 @@
 <file path=ppt/slides/slide6.xml><?xml version="1.0" encoding="utf-8"?>
 <p:sld xmlns:a="http://schemas.openxmlformats.org/drawingml/2006/main" xmlns:p="http://schemas.openxmlformats.org/presentationml/2006/main" xmlns:r="http://schemas.openxmlformats.org/officeDocument/2006/relationships">
   <p:cSld>
-    <p:bg>
-      <p:bgPr>
-        <a:solidFill>
-          <a:srgbClr val="FFFFFF"/>
-        </a:solidFill>
-        <a:effectLst/>
-      </p:bgPr>
-    </p:bg>
     <p:spTree>
       <p:nvGrpSpPr>
         <p:cNvPr id="1" name=""/>
@@ -8142,383 +6497,30 @@
         <p:nvPr/>
       </p:nvGrpSpPr>
       <p:grpSpPr/>
-      <p:sp>
-        <p:nvSpPr>
-          <p:cNvPr id="3" name="장식"/>
-          <p:cNvSpPr/>
+      <p:pic>
+        <p:nvPicPr>
+          <p:cNvPr id="3" name="표지 그림" descr="talk-40.jpg"/>
+          <p:cNvPicPr>
+            <a:picLocks noChangeAspect="1"/>
+          </p:cNvPicPr>
           <p:nvPr/>
-        </p:nvSpPr>
-        <p:spPr>
-          <a:xfrm>
-            <a:off x="0" y="2057400"/>
-            <a:ext cx="10241023" cy="1828800"/>
-          </a:xfrm>
-          <a:prstGeom prst="homePlate">
-            <a:avLst/>
-          </a:prstGeom>
-          <a:solidFill>
-            <a:srgbClr val="AE7429"/>
-          </a:solidFill>
-          <a:ln>
-            <a:noFill/>
-          </a:ln>
-        </p:spPr>
-        <p:txBody>
-          <a:bodyPr rtlCol="0" anchor="ctr"/>
-          <a:lstStyle/>
-          <a:p>
-            <a:pPr algn="ctr"/>
-          </a:p>
-        </p:txBody>
-      </p:sp>
-      <p:sp>
-        <p:nvSpPr>
-          <p:cNvPr id="4" name="장식"/>
-          <p:cNvSpPr/>
-          <p:nvPr/>
-        </p:nvSpPr>
-        <p:spPr>
-          <a:xfrm>
-            <a:off x="0" y="3886200"/>
-            <a:ext cx="9509522" cy="64008"/>
+        </p:nvPicPr>
+        <p:blipFill>
+          <a:blip r:embed="rId2"/>
+          <a:stretch>
+            <a:fillRect/>
+          </a:stretch>
+        </p:blipFill>
+        <p:spPr>
+          <a:xfrm>
+            <a:off x="0" y="0"/>
+            <a:ext cx="12191695" cy="6858000"/>
           </a:xfrm>
           <a:prstGeom prst="rect">
             <a:avLst/>
           </a:prstGeom>
-          <a:solidFill>
-            <a:srgbClr val="3B8B91"/>
-          </a:solidFill>
-          <a:ln>
-            <a:noFill/>
-          </a:ln>
-        </p:spPr>
-        <p:txBody>
-          <a:bodyPr rtlCol="0" anchor="ctr"/>
-          <a:lstStyle/>
-          <a:p>
-            <a:pPr algn="ctr"/>
-          </a:p>
-        </p:txBody>
-      </p:sp>
-      <p:sp>
-        <p:nvSpPr>
-          <p:cNvPr id="5" name="장식"/>
-          <p:cNvSpPr/>
-          <p:nvPr/>
-        </p:nvSpPr>
-        <p:spPr>
-          <a:xfrm>
-            <a:off x="9263744" y="704815"/>
-            <a:ext cx="452864" cy="452864"/>
-          </a:xfrm>
-          <a:prstGeom prst="ellipse">
-            <a:avLst/>
-          </a:prstGeom>
-          <a:solidFill>
-            <a:srgbClr val="AE7429"/>
-          </a:solidFill>
-          <a:ln>
-            <a:noFill/>
-          </a:ln>
-        </p:spPr>
-        <p:txBody>
-          <a:bodyPr rtlCol="0" anchor="ctr"/>
-          <a:lstStyle/>
-          <a:p>
-            <a:pPr algn="ctr"/>
-          </a:p>
-        </p:txBody>
-      </p:sp>
-      <p:sp>
-        <p:nvSpPr>
-          <p:cNvPr id="6" name="장식"/>
-          <p:cNvSpPr/>
-          <p:nvPr/>
-        </p:nvSpPr>
-        <p:spPr>
-          <a:xfrm>
-            <a:off x="10595107" y="856829"/>
-            <a:ext cx="275764" cy="275764"/>
-          </a:xfrm>
-          <a:prstGeom prst="ellipse">
-            <a:avLst/>
-          </a:prstGeom>
-          <a:solidFill>
-            <a:srgbClr val="F5E3CC"/>
-          </a:solidFill>
-          <a:ln>
-            <a:noFill/>
-          </a:ln>
-        </p:spPr>
-        <p:txBody>
-          <a:bodyPr rtlCol="0" anchor="ctr"/>
-          <a:lstStyle/>
-          <a:p>
-            <a:pPr algn="ctr"/>
-          </a:p>
-        </p:txBody>
-      </p:sp>
-      <p:sp>
-        <p:nvSpPr>
-          <p:cNvPr id="7" name="장식"/>
-          <p:cNvSpPr/>
-          <p:nvPr/>
-        </p:nvSpPr>
-        <p:spPr>
-          <a:xfrm>
-            <a:off x="11246098" y="2492187"/>
-            <a:ext cx="292227" cy="292227"/>
-          </a:xfrm>
-          <a:prstGeom prst="ellipse">
-            <a:avLst/>
-          </a:prstGeom>
-          <a:solidFill>
-            <a:srgbClr val="3B8B91"/>
-          </a:solidFill>
-          <a:ln>
-            <a:noFill/>
-          </a:ln>
-        </p:spPr>
-        <p:txBody>
-          <a:bodyPr rtlCol="0" anchor="ctr"/>
-          <a:lstStyle/>
-          <a:p>
-            <a:pPr algn="ctr"/>
-          </a:p>
-        </p:txBody>
-      </p:sp>
-      <p:sp>
-        <p:nvSpPr>
-          <p:cNvPr id="8" name="장식"/>
-          <p:cNvSpPr/>
-          <p:nvPr/>
-        </p:nvSpPr>
-        <p:spPr>
-          <a:xfrm>
-            <a:off x="10856002" y="963247"/>
-            <a:ext cx="216899" cy="216899"/>
-          </a:xfrm>
-          <a:prstGeom prst="ellipse">
-            <a:avLst/>
-          </a:prstGeom>
-          <a:solidFill>
-            <a:srgbClr val="AE7429"/>
-          </a:solidFill>
-          <a:ln>
-            <a:noFill/>
-          </a:ln>
-        </p:spPr>
-        <p:txBody>
-          <a:bodyPr rtlCol="0" anchor="ctr"/>
-          <a:lstStyle/>
-          <a:p>
-            <a:pPr algn="ctr"/>
-          </a:p>
-        </p:txBody>
-      </p:sp>
-      <p:sp>
-        <p:nvSpPr>
-          <p:cNvPr id="9" name="장식"/>
-          <p:cNvSpPr/>
-          <p:nvPr/>
-        </p:nvSpPr>
-        <p:spPr>
-          <a:xfrm>
-            <a:off x="9592789" y="299863"/>
-            <a:ext cx="236902" cy="236902"/>
-          </a:xfrm>
-          <a:prstGeom prst="ellipse">
-            <a:avLst/>
-          </a:prstGeom>
-          <a:solidFill>
-            <a:srgbClr val="F5E3CC"/>
-          </a:solidFill>
-          <a:ln>
-            <a:noFill/>
-          </a:ln>
-        </p:spPr>
-        <p:txBody>
-          <a:bodyPr rtlCol="0" anchor="ctr"/>
-          <a:lstStyle/>
-          <a:p>
-            <a:pPr algn="ctr"/>
-          </a:p>
-        </p:txBody>
-      </p:sp>
-      <p:sp>
-        <p:nvSpPr>
-          <p:cNvPr id="10" name="장식"/>
-          <p:cNvSpPr/>
-          <p:nvPr/>
-        </p:nvSpPr>
-        <p:spPr>
-          <a:xfrm>
-            <a:off x="11671528" y="2282743"/>
-            <a:ext cx="391317" cy="391317"/>
-          </a:xfrm>
-          <a:prstGeom prst="ellipse">
-            <a:avLst/>
-          </a:prstGeom>
-          <a:solidFill>
-            <a:srgbClr val="3B8B91"/>
-          </a:solidFill>
-          <a:ln>
-            <a:noFill/>
-          </a:ln>
-        </p:spPr>
-        <p:txBody>
-          <a:bodyPr rtlCol="0" anchor="ctr"/>
-          <a:lstStyle/>
-          <a:p>
-            <a:pPr algn="ctr"/>
-          </a:p>
-        </p:txBody>
-      </p:sp>
-      <p:sp>
-        <p:nvSpPr>
-          <p:cNvPr id="11" name="장식"/>
-          <p:cNvSpPr/>
-          <p:nvPr/>
-        </p:nvSpPr>
-        <p:spPr>
-          <a:xfrm>
-            <a:off x="10999413" y="442115"/>
-            <a:ext cx="455801" cy="455801"/>
-          </a:xfrm>
-          <a:prstGeom prst="ellipse">
-            <a:avLst/>
-          </a:prstGeom>
-          <a:solidFill>
-            <a:srgbClr val="AE7429"/>
-          </a:solidFill>
-          <a:ln>
-            <a:noFill/>
-          </a:ln>
-        </p:spPr>
-        <p:txBody>
-          <a:bodyPr rtlCol="0" anchor="ctr"/>
-          <a:lstStyle/>
-          <a:p>
-            <a:pPr algn="ctr"/>
-          </a:p>
-        </p:txBody>
-      </p:sp>
-      <p:sp>
-        <p:nvSpPr>
-          <p:cNvPr id="12" name="장식"/>
-          <p:cNvSpPr/>
-          <p:nvPr/>
-        </p:nvSpPr>
-        <p:spPr>
-          <a:xfrm>
-            <a:off x="10212933" y="489281"/>
-            <a:ext cx="358123" cy="358123"/>
-          </a:xfrm>
-          <a:prstGeom prst="ellipse">
-            <a:avLst/>
-          </a:prstGeom>
-          <a:solidFill>
-            <a:srgbClr val="F5E3CC"/>
-          </a:solidFill>
-          <a:ln>
-            <a:noFill/>
-          </a:ln>
-        </p:spPr>
-        <p:txBody>
-          <a:bodyPr rtlCol="0" anchor="ctr"/>
-          <a:lstStyle/>
-          <a:p>
-            <a:pPr algn="ctr"/>
-          </a:p>
-        </p:txBody>
-      </p:sp>
-      <p:sp>
-        <p:nvSpPr>
-          <p:cNvPr id="13" name="장식"/>
-          <p:cNvSpPr/>
-          <p:nvPr/>
-        </p:nvSpPr>
-        <p:spPr>
-          <a:xfrm>
-            <a:off x="11865382" y="1333302"/>
-            <a:ext cx="269303" cy="269303"/>
-          </a:xfrm>
-          <a:prstGeom prst="ellipse">
-            <a:avLst/>
-          </a:prstGeom>
-          <a:solidFill>
-            <a:srgbClr val="3B8B91"/>
-          </a:solidFill>
-          <a:ln>
-            <a:noFill/>
-          </a:ln>
-        </p:spPr>
-        <p:txBody>
-          <a:bodyPr rtlCol="0" anchor="ctr"/>
-          <a:lstStyle/>
-          <a:p>
-            <a:pPr algn="ctr"/>
-          </a:p>
-        </p:txBody>
-      </p:sp>
-      <p:sp>
-        <p:nvSpPr>
-          <p:cNvPr id="14" name="장식"/>
-          <p:cNvSpPr/>
-          <p:nvPr/>
-        </p:nvSpPr>
-        <p:spPr>
-          <a:xfrm>
-            <a:off x="11308724" y="1757165"/>
-            <a:ext cx="317138" cy="317138"/>
-          </a:xfrm>
-          <a:prstGeom prst="ellipse">
-            <a:avLst/>
-          </a:prstGeom>
-          <a:solidFill>
-            <a:srgbClr val="AE7429"/>
-          </a:solidFill>
-          <a:ln>
-            <a:noFill/>
-          </a:ln>
-        </p:spPr>
-        <p:txBody>
-          <a:bodyPr rtlCol="0" anchor="ctr"/>
-          <a:lstStyle/>
-          <a:p>
-            <a:pPr algn="ctr"/>
-          </a:p>
-        </p:txBody>
-      </p:sp>
-      <p:sp>
-        <p:nvSpPr>
-          <p:cNvPr id="15" name="장식"/>
-          <p:cNvSpPr/>
-          <p:nvPr/>
-        </p:nvSpPr>
-        <p:spPr>
-          <a:xfrm>
-            <a:off x="9664609" y="74145"/>
-            <a:ext cx="370756" cy="370756"/>
-          </a:xfrm>
-          <a:prstGeom prst="ellipse">
-            <a:avLst/>
-          </a:prstGeom>
-          <a:solidFill>
-            <a:srgbClr val="F5E3CC"/>
-          </a:solidFill>
-          <a:ln>
-            <a:noFill/>
-          </a:ln>
-        </p:spPr>
-        <p:txBody>
-          <a:bodyPr rtlCol="0" anchor="ctr"/>
-          <a:lstStyle/>
-          <a:p>
-            <a:pPr algn="ctr"/>
-          </a:p>
-        </p:txBody>
-      </p:sp>
+        </p:spPr>
+      </p:pic>
       <p:sp>
         <p:nvSpPr>
           <p:cNvPr id="2" name="Title 1"/>
@@ -8531,8 +6533,8 @@
         </p:nvSpPr>
         <p:spPr>
           <a:xfrm>
-            <a:off x="731501" y="2167128"/>
-            <a:ext cx="8778020" cy="1609344"/>
+            <a:off x="853418" y="2057400"/>
+            <a:ext cx="6095847" cy="1554480"/>
           </a:xfrm>
         </p:spPr>
         <p:txBody>
@@ -8549,7 +6551,7 @@
             <a:r>
               <a:rPr sz="3600" b="1" i="0">
                 <a:solidFill>
-                  <a:srgbClr val="FFFFFF"/>
+                  <a:srgbClr val="5B3D15"/>
                 </a:solidFill>
               </a:rPr>
               <a:t>감사합니다</a:t>
@@ -8559,14 +6561,14 @@
       </p:sp>
       <p:sp>
         <p:nvSpPr>
-          <p:cNvPr id="16" name="한 줄 문구"/>
+          <p:cNvPr id="4" name="한 줄 문구"/>
           <p:cNvSpPr txBox="1"/>
           <p:nvPr/>
         </p:nvSpPr>
         <p:spPr>
           <a:xfrm>
-            <a:off x="731501" y="4160520"/>
-            <a:ext cx="8534186" cy="822960"/>
+            <a:off x="853418" y="3749039"/>
+            <a:ext cx="6095847" cy="822960"/>
           </a:xfrm>
           <a:prstGeom prst="rect">
             <a:avLst/>
@@ -8590,21 +6592,21 @@
                   <a:srgbClr val="5B3D15"/>
                 </a:solidFill>
               </a:rPr>
-              <a:t>들어 주셔서 고맙습니다</a:t>
-            </a:r>
-          </a:p>
-        </p:txBody>
-      </p:sp>
-      <p:sp>
-        <p:nvSpPr>
-          <p:cNvPr id="17" name="안내 문구"/>
+              <a:t>끝까지 들어 주셔서 고맙습니다</a:t>
+            </a:r>
+          </a:p>
+        </p:txBody>
+      </p:sp>
+      <p:sp>
+        <p:nvSpPr>
+          <p:cNvPr id="5" name="안내 문구"/>
           <p:cNvSpPr txBox="1"/>
           <p:nvPr/>
         </p:nvSpPr>
         <p:spPr>
           <a:xfrm>
-            <a:off x="731501" y="5029200"/>
-            <a:ext cx="8534186" cy="914400"/>
+            <a:off x="853418" y="4617720"/>
+            <a:ext cx="6095847" cy="914400"/>
           </a:xfrm>
           <a:prstGeom prst="rect">
             <a:avLst/>
